--- a/ppt/AdithyaReddyMadireddy_X25120280_retail-footfall-inventory.pptx
+++ b/ppt/AdithyaReddyMadireddy_X25120280_retail-footfall-inventory.pptx
@@ -1163,7 +1163,7 @@
           <a:bodyPr wrap="square" rtlCol="0" anchor="t"/>
           <a:lstStyle/>
           <a:p>
-            <a:pPr algn="l" indent="0" marL="0">
+            <a:pPr indent="0" marL="0">
               <a:buNone/>
             </a:pPr>
             <a:r>
@@ -1314,7 +1314,7 @@
               <a:buNone/>
             </a:pPr>
             <a:r>
-              <a:rPr lang="en-US" sz="1400" b="1" dirty="0">
+              <a:rPr lang="en-US" sz="1350" b="1" dirty="0">
                 <a:solidFill>
                   <a:srgbClr val="E8B23C"/>
                 </a:solidFill>
@@ -1324,7 +1324,7 @@
               </a:rPr>
               <a:t>Shelf stock floor</a:t>
             </a:r>
-            <a:endParaRPr lang="en-US" sz="1400" dirty="0"/>
+            <a:endParaRPr lang="en-US" sz="1350" dirty="0"/>
           </a:p>
         </p:txBody>
       </p:sp>
@@ -1380,7 +1380,7 @@
               <a:buNone/>
             </a:pPr>
             <a:r>
-              <a:rPr lang="en-US" sz="1400" b="1" dirty="0">
+              <a:rPr lang="en-US" sz="1350" b="1" dirty="0">
                 <a:solidFill>
                   <a:srgbClr val="E8B23C"/>
                 </a:solidFill>
@@ -1390,7 +1390,7 @@
               </a:rPr>
               <a:t>Queue / footfall ceilings</a:t>
             </a:r>
-            <a:endParaRPr lang="en-US" sz="1400" dirty="0"/>
+            <a:endParaRPr lang="en-US" sz="1350" dirty="0"/>
           </a:p>
         </p:txBody>
       </p:sp>
@@ -1446,7 +1446,7 @@
               <a:buNone/>
             </a:pPr>
             <a:r>
-              <a:rPr lang="en-US" sz="1400" b="1" dirty="0">
+              <a:rPr lang="en-US" sz="1350" b="1" dirty="0">
                 <a:solidFill>
                   <a:srgbClr val="E8B23C"/>
                 </a:solidFill>
@@ -1456,7 +1456,7 @@
               </a:rPr>
               <a:t>10 s alert window</a:t>
             </a:r>
-            <a:endParaRPr lang="en-US" sz="1400" dirty="0"/>
+            <a:endParaRPr lang="en-US" sz="1350" dirty="0"/>
           </a:p>
         </p:txBody>
       </p:sp>
@@ -1605,8 +1605,8 @@
         </p:nvSpPr>
         <p:spPr>
           <a:xfrm>
-            <a:off x="1325880" y="2670048"/>
-            <a:ext cx="201168" cy="201168"/>
+            <a:off x="1335024" y="2633472"/>
+            <a:ext cx="182880" cy="182880"/>
           </a:xfrm>
           <a:prstGeom prst="ellipse">
             <a:avLst/>
@@ -1625,8 +1625,8 @@
         </p:nvSpPr>
         <p:spPr>
           <a:xfrm>
-            <a:off x="594360" y="2926080"/>
-            <a:ext cx="1664208" cy="411480"/>
+            <a:off x="612648" y="2852928"/>
+            <a:ext cx="1627632" cy="365760"/>
           </a:xfrm>
           <a:prstGeom prst="rect">
             <a:avLst/>
@@ -1664,8 +1664,8 @@
         </p:nvSpPr>
         <p:spPr>
           <a:xfrm>
-            <a:off x="621792" y="3310128"/>
-            <a:ext cx="1609344" cy="457200"/>
+            <a:off x="640080" y="3200400"/>
+            <a:ext cx="1572768" cy="411480"/>
           </a:xfrm>
           <a:prstGeom prst="rect">
             <a:avLst/>
@@ -1754,8 +1754,8 @@
         </p:nvSpPr>
         <p:spPr>
           <a:xfrm>
-            <a:off x="3193633" y="2670048"/>
-            <a:ext cx="201168" cy="201168"/>
+            <a:off x="3202777" y="2633472"/>
+            <a:ext cx="182880" cy="182880"/>
           </a:xfrm>
           <a:prstGeom prst="ellipse">
             <a:avLst/>
@@ -1774,8 +1774,8 @@
         </p:nvSpPr>
         <p:spPr>
           <a:xfrm>
-            <a:off x="2462113" y="2926080"/>
-            <a:ext cx="1664208" cy="411480"/>
+            <a:off x="2480401" y="2852928"/>
+            <a:ext cx="1627632" cy="365760"/>
           </a:xfrm>
           <a:prstGeom prst="rect">
             <a:avLst/>
@@ -1813,8 +1813,8 @@
         </p:nvSpPr>
         <p:spPr>
           <a:xfrm>
-            <a:off x="2489545" y="3310128"/>
-            <a:ext cx="1609344" cy="457200"/>
+            <a:off x="2507833" y="3200400"/>
+            <a:ext cx="1572768" cy="411480"/>
           </a:xfrm>
           <a:prstGeom prst="rect">
             <a:avLst/>
@@ -1903,8 +1903,8 @@
         </p:nvSpPr>
         <p:spPr>
           <a:xfrm>
-            <a:off x="5061387" y="2670048"/>
-            <a:ext cx="201168" cy="201168"/>
+            <a:off x="5070531" y="2633472"/>
+            <a:ext cx="182880" cy="182880"/>
           </a:xfrm>
           <a:prstGeom prst="ellipse">
             <a:avLst/>
@@ -1923,8 +1923,8 @@
         </p:nvSpPr>
         <p:spPr>
           <a:xfrm>
-            <a:off x="4329867" y="2926080"/>
-            <a:ext cx="1664208" cy="411480"/>
+            <a:off x="4348155" y="2852928"/>
+            <a:ext cx="1627632" cy="365760"/>
           </a:xfrm>
           <a:prstGeom prst="rect">
             <a:avLst/>
@@ -1962,8 +1962,8 @@
         </p:nvSpPr>
         <p:spPr>
           <a:xfrm>
-            <a:off x="4357299" y="3310128"/>
-            <a:ext cx="1609344" cy="457200"/>
+            <a:off x="4375587" y="3200400"/>
+            <a:ext cx="1572768" cy="411480"/>
           </a:xfrm>
           <a:prstGeom prst="rect">
             <a:avLst/>
@@ -2052,8 +2052,8 @@
         </p:nvSpPr>
         <p:spPr>
           <a:xfrm>
-            <a:off x="6929140" y="2670048"/>
-            <a:ext cx="201168" cy="201168"/>
+            <a:off x="6938284" y="2633472"/>
+            <a:ext cx="182880" cy="182880"/>
           </a:xfrm>
           <a:prstGeom prst="ellipse">
             <a:avLst/>
@@ -2072,8 +2072,8 @@
         </p:nvSpPr>
         <p:spPr>
           <a:xfrm>
-            <a:off x="6197620" y="2926080"/>
-            <a:ext cx="1664208" cy="411480"/>
+            <a:off x="6215908" y="2852928"/>
+            <a:ext cx="1627632" cy="365760"/>
           </a:xfrm>
           <a:prstGeom prst="rect">
             <a:avLst/>
@@ -2111,8 +2111,8 @@
         </p:nvSpPr>
         <p:spPr>
           <a:xfrm>
-            <a:off x="6225052" y="3310128"/>
-            <a:ext cx="1609344" cy="457200"/>
+            <a:off x="6243340" y="3200400"/>
+            <a:ext cx="1572768" cy="411480"/>
           </a:xfrm>
           <a:prstGeom prst="rect">
             <a:avLst/>
@@ -2201,8 +2201,8 @@
         </p:nvSpPr>
         <p:spPr>
           <a:xfrm>
-            <a:off x="8796894" y="2670048"/>
-            <a:ext cx="201168" cy="201168"/>
+            <a:off x="8806038" y="2633472"/>
+            <a:ext cx="182880" cy="182880"/>
           </a:xfrm>
           <a:prstGeom prst="ellipse">
             <a:avLst/>
@@ -2221,8 +2221,8 @@
         </p:nvSpPr>
         <p:spPr>
           <a:xfrm>
-            <a:off x="8065374" y="2926080"/>
-            <a:ext cx="1664208" cy="411480"/>
+            <a:off x="8083662" y="2852928"/>
+            <a:ext cx="1627632" cy="365760"/>
           </a:xfrm>
           <a:prstGeom prst="rect">
             <a:avLst/>
@@ -2260,8 +2260,8 @@
         </p:nvSpPr>
         <p:spPr>
           <a:xfrm>
-            <a:off x="8092806" y="3310128"/>
-            <a:ext cx="1609344" cy="457200"/>
+            <a:off x="8111094" y="3200400"/>
+            <a:ext cx="1572768" cy="411480"/>
           </a:xfrm>
           <a:prstGeom prst="rect">
             <a:avLst/>
@@ -2350,8 +2350,8 @@
         </p:nvSpPr>
         <p:spPr>
           <a:xfrm>
-            <a:off x="10664647" y="2670048"/>
-            <a:ext cx="201168" cy="201168"/>
+            <a:off x="10673791" y="2633472"/>
+            <a:ext cx="182880" cy="182880"/>
           </a:xfrm>
           <a:prstGeom prst="ellipse">
             <a:avLst/>
@@ -2370,8 +2370,8 @@
         </p:nvSpPr>
         <p:spPr>
           <a:xfrm>
-            <a:off x="9933127" y="2926080"/>
-            <a:ext cx="1664208" cy="411480"/>
+            <a:off x="9951415" y="2852928"/>
+            <a:ext cx="1627632" cy="365760"/>
           </a:xfrm>
           <a:prstGeom prst="rect">
             <a:avLst/>
@@ -2409,8 +2409,8 @@
         </p:nvSpPr>
         <p:spPr>
           <a:xfrm>
-            <a:off x="9960559" y="3310128"/>
-            <a:ext cx="1609344" cy="457200"/>
+            <a:off x="9978847" y="3200400"/>
+            <a:ext cx="1572768" cy="411480"/>
           </a:xfrm>
           <a:prstGeom prst="rect">
             <a:avLst/>
@@ -2526,8 +2526,8 @@
         </p:nvSpPr>
         <p:spPr>
           <a:xfrm>
-            <a:off x="640080" y="5212080"/>
-            <a:ext cx="10972800" cy="640080"/>
+            <a:off x="640080" y="5257800"/>
+            <a:ext cx="10972800" cy="731520"/>
           </a:xfrm>
           <a:prstGeom prst="rect">
             <a:avLst/>
@@ -2759,7 +2759,7 @@
                 <a:ea typeface="Calibri" pitchFamily="34" charset="-122"/>
                 <a:cs typeface="Calibri" pitchFamily="34" charset="-120"/>
               </a:rPr>
-              <a:t>Pipeline health, all green</a:t>
+              <a:t>Four estate KPIs, then per store</a:t>
             </a:r>
             <a:endParaRPr lang="en-US" sz="1800" dirty="0"/>
           </a:p>
@@ -2798,7 +2798,7 @@
                 <a:ea typeface="Calibri" pitchFamily="34" charset="-122"/>
                 <a:cs typeface="Calibri" pitchFamily="34" charset="-120"/>
               </a:rPr>
-              <a:t>Gateway, queue, Lambda and end-to-end freshness all healthy on the live estate roll-up.</a:t>
+              <a:t>Footfall, shelf stock, fridge temperature, queue length and energy draw roll up to four estate tiles, then break out per store.</a:t>
             </a:r>
             <a:endParaRPr lang="en-US" sz="1350" dirty="0"/>
           </a:p>
@@ -2896,7 +2896,7 @@
                 <a:ea typeface="Calibri" pitchFamily="34" charset="-122"/>
                 <a:cs typeface="Calibri" pitchFamily="34" charset="-120"/>
               </a:rPr>
-              <a:t>Live store readings</a:t>
+              <a:t>Mixed-polarity rules</a:t>
             </a:r>
             <a:endParaRPr lang="en-US" sz="1800" dirty="0"/>
           </a:p>
@@ -2935,7 +2935,7 @@
                 <a:ea typeface="Calibri" pitchFamily="34" charset="-122"/>
                 <a:cs typeface="Calibri" pitchFamily="34" charset="-120"/>
               </a:rPr>
-              <a:t>Footfall, shelf stock, fridge temperature, queue length and energy draw across two stores, with KPI tiles and trend charts.</a:t>
+              <a:t>Shelf stock has a depletion floor while queue and footfall have ceilings — each raises the moment its window crosses in the right direction.</a:t>
             </a:r>
             <a:endParaRPr lang="en-US" sz="1350" dirty="0"/>
           </a:p>
@@ -3033,7 +3033,7 @@
                 <a:ea typeface="Calibri" pitchFamily="34" charset="-122"/>
                 <a:cs typeface="Calibri" pitchFamily="34" charset="-120"/>
               </a:rPr>
-              <a:t>Tested and scales</a:t>
+              <a:t>A refrigeration warning on real data</a:t>
             </a:r>
             <a:endParaRPr lang="en-US" sz="1800" dirty="0"/>
           </a:p>
@@ -3072,7 +3072,7 @@
                 <a:ea typeface="Calibri" pitchFamily="34" charset="-122"/>
                 <a:cs typeface="Calibri" pitchFamily="34" charset="-120"/>
               </a:rPr>
-              <a:t>122 automated JUnit tests pass across sensor, fog, processor and dashboard; a 2,000-message burst via 32 workers.</a:t>
+              <a:t>A fridge drifting warm in one store raises the refrigeration warning on its card while the rest stay nominal.</a:t>
             </a:r>
             <a:endParaRPr lang="en-US" sz="1350" dirty="0"/>
           </a:p>
@@ -3157,24 +3157,24 @@
         </p:nvSpPr>
         <p:spPr>
           <a:xfrm>
-            <a:off x="640080" y="640080"/>
-            <a:ext cx="10972800" cy="640080"/>
-          </a:xfrm>
-          <a:prstGeom prst="rect">
-            <a:avLst/>
-          </a:prstGeom>
-          <a:noFill/>
-          <a:ln/>
-        </p:spPr>
-        <p:txBody>
-          <a:bodyPr wrap="square" rtlCol="0" anchor="ctr"/>
+            <a:off x="640080" y="594360"/>
+            <a:ext cx="10972800" cy="822960"/>
+          </a:xfrm>
+          <a:prstGeom prst="rect">
+            <a:avLst/>
+          </a:prstGeom>
+          <a:noFill/>
+          <a:ln/>
+        </p:spPr>
+        <p:txBody>
+          <a:bodyPr wrap="square" rtlCol="0" anchor="t"/>
           <a:lstStyle/>
           <a:p>
             <a:pPr indent="0" marL="0">
               <a:buNone/>
             </a:pPr>
             <a:r>
-              <a:rPr lang="en-US" sz="3000" b="1" dirty="0">
+              <a:rPr lang="en-US" sz="2800" b="1" dirty="0">
                 <a:solidFill>
                   <a:srgbClr val="FFFFFF"/>
                 </a:solidFill>
@@ -3184,7 +3184,7 @@
               </a:rPr>
               <a:t>Hardest Part — one buffer, many writers</a:t>
             </a:r>
-            <a:endParaRPr lang="en-US" sz="3000" dirty="0"/>
+            <a:endParaRPr lang="en-US" sz="2800" dirty="0"/>
           </a:p>
         </p:txBody>
       </p:sp>

--- a/ppt/AdithyaReddyMadireddy_X25120280_retail-footfall-inventory.pptx
+++ b/ppt/AdithyaReddyMadireddy_X25120280_retail-footfall-inventory.pptx
@@ -3131,7 +3131,7 @@
     <p:bg>
       <p:bgPr>
         <a:solidFill>
-          <a:srgbClr val="241A30"/>
+          <a:srgbClr val="FFFFFF"/>
         </a:solidFill>
       </p:bgPr>
     </p:bg>
@@ -3157,7 +3157,7 @@
         </p:nvSpPr>
         <p:spPr>
           <a:xfrm>
-            <a:off x="640080" y="594360"/>
+            <a:off x="640080" y="502920"/>
             <a:ext cx="10972800" cy="822960"/>
           </a:xfrm>
           <a:prstGeom prst="rect">
@@ -3176,7 +3176,7 @@
             <a:r>
               <a:rPr lang="en-US" sz="2800" b="1" dirty="0">
                 <a:solidFill>
-                  <a:srgbClr val="FFFFFF"/>
+                  <a:srgbClr val="221A2E"/>
                 </a:solidFill>
                 <a:latin typeface="Century Schoolbook" pitchFamily="34" charset="0"/>
                 <a:ea typeface="Century Schoolbook" pitchFamily="34" charset="-122"/>
@@ -3205,9 +3205,9 @@
             </a:avLst>
           </a:prstGeom>
           <a:solidFill>
-            <a:srgbClr val="30253F"/>
-          </a:solidFill>
-          <a:ln w="15875">
+            <a:srgbClr val="F2EEF8"/>
+          </a:solidFill>
+          <a:ln w="19050">
             <a:solidFill>
               <a:srgbClr val="E8B23C"/>
             </a:solidFill>
@@ -3284,7 +3284,7 @@
             <a:r>
               <a:rPr lang="en-US" sz="1300" dirty="0">
                 <a:solidFill>
-                  <a:srgbClr val="DCD0EC"/>
+                  <a:srgbClr val="221A2E"/>
                 </a:solidFill>
                 <a:latin typeface="Calibri" pitchFamily="34" charset="0"/>
                 <a:ea typeface="Calibri" pitchFamily="34" charset="-122"/>
@@ -3313,11 +3313,11 @@
             </a:avLst>
           </a:prstGeom>
           <a:solidFill>
-            <a:srgbClr val="30253F"/>
-          </a:solidFill>
-          <a:ln w="15875">
+            <a:srgbClr val="F2EEF8"/>
+          </a:solidFill>
+          <a:ln w="19050">
             <a:solidFill>
-              <a:srgbClr val="9D7BC0"/>
+              <a:srgbClr val="7A52A8"/>
             </a:solidFill>
             <a:prstDash val="solid"/>
           </a:ln>
@@ -3350,7 +3350,7 @@
             <a:r>
               <a:rPr lang="en-US" sz="1900" b="1" dirty="0">
                 <a:solidFill>
-                  <a:srgbClr val="9D7BC0"/>
+                  <a:srgbClr val="7A52A8"/>
                 </a:solidFill>
                 <a:latin typeface="Century Schoolbook" pitchFamily="34" charset="0"/>
                 <a:ea typeface="Century Schoolbook" pitchFamily="34" charset="-122"/>
@@ -3392,7 +3392,7 @@
             <a:r>
               <a:rPr lang="en-US" sz="1300" dirty="0">
                 <a:solidFill>
-                  <a:srgbClr val="DCD0EC"/>
+                  <a:srgbClr val="221A2E"/>
                 </a:solidFill>
                 <a:latin typeface="Calibri" pitchFamily="34" charset="0"/>
                 <a:ea typeface="Calibri" pitchFamily="34" charset="-122"/>

--- a/ppt/AdithyaReddyMadireddy_X25120280_retail-footfall-inventory.pptx
+++ b/ppt/AdithyaReddyMadireddy_X25120280_retail-footfall-inventory.pptx
@@ -2675,8 +2675,35 @@
         </p:nvSpPr>
         <p:spPr>
           <a:xfrm>
-            <a:off x="731520" y="1965960"/>
-            <a:ext cx="685800" cy="685800"/>
+            <a:off x="640080" y="1874520"/>
+            <a:ext cx="3502152" cy="3977640"/>
+          </a:xfrm>
+          <a:prstGeom prst="roundRect">
+            <a:avLst>
+              <a:gd name="adj" fmla="val 2611"/>
+            </a:avLst>
+          </a:prstGeom>
+          <a:solidFill>
+            <a:srgbClr val="F2EEF8"/>
+          </a:solidFill>
+          <a:ln w="15240">
+            <a:solidFill>
+              <a:srgbClr val="7A52A8"/>
+            </a:solidFill>
+            <a:prstDash val="solid"/>
+          </a:ln>
+        </p:spPr>
+      </p:sp>
+      <p:sp>
+        <p:nvSpPr>
+          <p:cNvPr id="5" name="Shape 3"/>
+          <p:cNvSpPr/>
+          <p:nvPr/>
+        </p:nvSpPr>
+        <p:spPr>
+          <a:xfrm>
+            <a:off x="914400" y="2148840"/>
+            <a:ext cx="603504" cy="603504"/>
           </a:xfrm>
           <a:prstGeom prst="ellipse">
             <a:avLst/>
@@ -2689,14 +2716,14 @@
       </p:sp>
       <p:sp>
         <p:nvSpPr>
-          <p:cNvPr id="5" name="Text 3"/>
-          <p:cNvSpPr/>
-          <p:nvPr/>
-        </p:nvSpPr>
-        <p:spPr>
-          <a:xfrm>
-            <a:off x="731520" y="1965960"/>
-            <a:ext cx="685800" cy="685800"/>
+          <p:cNvPr id="6" name="Text 4"/>
+          <p:cNvSpPr/>
+          <p:nvPr/>
+        </p:nvSpPr>
+        <p:spPr>
+          <a:xfrm>
+            <a:off x="914400" y="2148840"/>
+            <a:ext cx="603504" cy="603504"/>
           </a:xfrm>
           <a:prstGeom prst="rect">
             <a:avLst/>
@@ -2712,7 +2739,7 @@
               <a:buNone/>
             </a:pPr>
             <a:r>
-              <a:rPr lang="en-US" sz="2600" b="1" dirty="0">
+              <a:rPr lang="en-US" sz="2200" b="1" dirty="0">
                 <a:solidFill>
                   <a:srgbClr val="FFFFFF"/>
                 </a:solidFill>
@@ -2722,20 +2749,20 @@
               </a:rPr>
               <a:t>1</a:t>
             </a:r>
-            <a:endParaRPr lang="en-US" sz="2600" dirty="0"/>
-          </a:p>
-        </p:txBody>
-      </p:sp>
-      <p:sp>
-        <p:nvSpPr>
-          <p:cNvPr id="6" name="Text 4"/>
-          <p:cNvSpPr/>
-          <p:nvPr/>
-        </p:nvSpPr>
-        <p:spPr>
-          <a:xfrm>
-            <a:off x="1691640" y="1920240"/>
-            <a:ext cx="9875520" cy="411480"/>
+            <a:endParaRPr lang="en-US" sz="2200" dirty="0"/>
+          </a:p>
+        </p:txBody>
+      </p:sp>
+      <p:sp>
+        <p:nvSpPr>
+          <p:cNvPr id="7" name="Text 5"/>
+          <p:cNvSpPr/>
+          <p:nvPr/>
+        </p:nvSpPr>
+        <p:spPr>
+          <a:xfrm>
+            <a:off x="914400" y="2898648"/>
+            <a:ext cx="2953512" cy="777240"/>
           </a:xfrm>
           <a:prstGeom prst="rect">
             <a:avLst/>
@@ -2751,7 +2778,7 @@
               <a:buNone/>
             </a:pPr>
             <a:r>
-              <a:rPr lang="en-US" sz="1800" b="1" dirty="0">
+              <a:rPr lang="en-US" sz="1600" b="1" dirty="0">
                 <a:solidFill>
                   <a:srgbClr val="221A2E"/>
                 </a:solidFill>
@@ -2761,20 +2788,20 @@
               </a:rPr>
               <a:t>Four estate KPIs, then per store</a:t>
             </a:r>
-            <a:endParaRPr lang="en-US" sz="1800" dirty="0"/>
-          </a:p>
-        </p:txBody>
-      </p:sp>
-      <p:sp>
-        <p:nvSpPr>
-          <p:cNvPr id="7" name="Text 5"/>
-          <p:cNvSpPr/>
-          <p:nvPr/>
-        </p:nvSpPr>
-        <p:spPr>
-          <a:xfrm>
-            <a:off x="1691640" y="2340864"/>
-            <a:ext cx="9875520" cy="640080"/>
+            <a:endParaRPr lang="en-US" sz="1600" dirty="0"/>
+          </a:p>
+        </p:txBody>
+      </p:sp>
+      <p:sp>
+        <p:nvSpPr>
+          <p:cNvPr id="8" name="Text 6"/>
+          <p:cNvSpPr/>
+          <p:nvPr/>
+        </p:nvSpPr>
+        <p:spPr>
+          <a:xfrm>
+            <a:off x="914400" y="3657600"/>
+            <a:ext cx="2953512" cy="2011680"/>
           </a:xfrm>
           <a:prstGeom prst="rect">
             <a:avLst/>
@@ -2787,10 +2814,13 @@
           <a:lstStyle/>
           <a:p>
             <a:pPr indent="0" marL="0">
-              <a:buNone/>
-            </a:pPr>
-            <a:r>
-              <a:rPr lang="en-US" sz="1350" dirty="0">
+              <a:lnSpc>
+                <a:spcPct val="106000"/>
+              </a:lnSpc>
+              <a:buNone/>
+            </a:pPr>
+            <a:r>
+              <a:rPr lang="en-US" sz="1250" dirty="0">
                 <a:solidFill>
                   <a:srgbClr val="6A5F78"/>
                 </a:solidFill>
@@ -2800,20 +2830,47 @@
               </a:rPr>
               <a:t>Footfall, shelf stock, fridge temperature, queue length and energy draw roll up to four estate tiles, then break out per store.</a:t>
             </a:r>
-            <a:endParaRPr lang="en-US" sz="1350" dirty="0"/>
-          </a:p>
-        </p:txBody>
-      </p:sp>
-      <p:sp>
-        <p:nvSpPr>
-          <p:cNvPr id="8" name="Shape 6"/>
-          <p:cNvSpPr/>
-          <p:nvPr/>
-        </p:nvSpPr>
-        <p:spPr>
-          <a:xfrm>
-            <a:off x="731520" y="3383280"/>
-            <a:ext cx="685800" cy="685800"/>
+            <a:endParaRPr lang="en-US" sz="1250" dirty="0"/>
+          </a:p>
+        </p:txBody>
+      </p:sp>
+      <p:sp>
+        <p:nvSpPr>
+          <p:cNvPr id="9" name="Shape 7"/>
+          <p:cNvSpPr/>
+          <p:nvPr/>
+        </p:nvSpPr>
+        <p:spPr>
+          <a:xfrm>
+            <a:off x="4416552" y="1874520"/>
+            <a:ext cx="3502152" cy="3977640"/>
+          </a:xfrm>
+          <a:prstGeom prst="roundRect">
+            <a:avLst>
+              <a:gd name="adj" fmla="val 2611"/>
+            </a:avLst>
+          </a:prstGeom>
+          <a:solidFill>
+            <a:srgbClr val="F2EEF8"/>
+          </a:solidFill>
+          <a:ln w="15240">
+            <a:solidFill>
+              <a:srgbClr val="7A52A8"/>
+            </a:solidFill>
+            <a:prstDash val="solid"/>
+          </a:ln>
+        </p:spPr>
+      </p:sp>
+      <p:sp>
+        <p:nvSpPr>
+          <p:cNvPr id="10" name="Shape 8"/>
+          <p:cNvSpPr/>
+          <p:nvPr/>
+        </p:nvSpPr>
+        <p:spPr>
+          <a:xfrm>
+            <a:off x="4690872" y="2148840"/>
+            <a:ext cx="603504" cy="603504"/>
           </a:xfrm>
           <a:prstGeom prst="ellipse">
             <a:avLst/>
@@ -2826,14 +2883,14 @@
       </p:sp>
       <p:sp>
         <p:nvSpPr>
-          <p:cNvPr id="9" name="Text 7"/>
-          <p:cNvSpPr/>
-          <p:nvPr/>
-        </p:nvSpPr>
-        <p:spPr>
-          <a:xfrm>
-            <a:off x="731520" y="3383280"/>
-            <a:ext cx="685800" cy="685800"/>
+          <p:cNvPr id="11" name="Text 9"/>
+          <p:cNvSpPr/>
+          <p:nvPr/>
+        </p:nvSpPr>
+        <p:spPr>
+          <a:xfrm>
+            <a:off x="4690872" y="2148840"/>
+            <a:ext cx="603504" cy="603504"/>
           </a:xfrm>
           <a:prstGeom prst="rect">
             <a:avLst/>
@@ -2849,7 +2906,7 @@
               <a:buNone/>
             </a:pPr>
             <a:r>
-              <a:rPr lang="en-US" sz="2600" b="1" dirty="0">
+              <a:rPr lang="en-US" sz="2200" b="1" dirty="0">
                 <a:solidFill>
                   <a:srgbClr val="FFFFFF"/>
                 </a:solidFill>
@@ -2859,20 +2916,20 @@
               </a:rPr>
               <a:t>2</a:t>
             </a:r>
-            <a:endParaRPr lang="en-US" sz="2600" dirty="0"/>
-          </a:p>
-        </p:txBody>
-      </p:sp>
-      <p:sp>
-        <p:nvSpPr>
-          <p:cNvPr id="10" name="Text 8"/>
-          <p:cNvSpPr/>
-          <p:nvPr/>
-        </p:nvSpPr>
-        <p:spPr>
-          <a:xfrm>
-            <a:off x="1691640" y="3337560"/>
-            <a:ext cx="9875520" cy="411480"/>
+            <a:endParaRPr lang="en-US" sz="2200" dirty="0"/>
+          </a:p>
+        </p:txBody>
+      </p:sp>
+      <p:sp>
+        <p:nvSpPr>
+          <p:cNvPr id="12" name="Text 10"/>
+          <p:cNvSpPr/>
+          <p:nvPr/>
+        </p:nvSpPr>
+        <p:spPr>
+          <a:xfrm>
+            <a:off x="4690872" y="2898648"/>
+            <a:ext cx="2953512" cy="777240"/>
           </a:xfrm>
           <a:prstGeom prst="rect">
             <a:avLst/>
@@ -2888,7 +2945,7 @@
               <a:buNone/>
             </a:pPr>
             <a:r>
-              <a:rPr lang="en-US" sz="1800" b="1" dirty="0">
+              <a:rPr lang="en-US" sz="1600" b="1" dirty="0">
                 <a:solidFill>
                   <a:srgbClr val="221A2E"/>
                 </a:solidFill>
@@ -2898,20 +2955,20 @@
               </a:rPr>
               <a:t>Mixed-polarity rules</a:t>
             </a:r>
-            <a:endParaRPr lang="en-US" sz="1800" dirty="0"/>
-          </a:p>
-        </p:txBody>
-      </p:sp>
-      <p:sp>
-        <p:nvSpPr>
-          <p:cNvPr id="11" name="Text 9"/>
-          <p:cNvSpPr/>
-          <p:nvPr/>
-        </p:nvSpPr>
-        <p:spPr>
-          <a:xfrm>
-            <a:off x="1691640" y="3758184"/>
-            <a:ext cx="9875520" cy="640080"/>
+            <a:endParaRPr lang="en-US" sz="1600" dirty="0"/>
+          </a:p>
+        </p:txBody>
+      </p:sp>
+      <p:sp>
+        <p:nvSpPr>
+          <p:cNvPr id="13" name="Text 11"/>
+          <p:cNvSpPr/>
+          <p:nvPr/>
+        </p:nvSpPr>
+        <p:spPr>
+          <a:xfrm>
+            <a:off x="4690872" y="3657600"/>
+            <a:ext cx="2953512" cy="2011680"/>
           </a:xfrm>
           <a:prstGeom prst="rect">
             <a:avLst/>
@@ -2924,10 +2981,13 @@
           <a:lstStyle/>
           <a:p>
             <a:pPr indent="0" marL="0">
-              <a:buNone/>
-            </a:pPr>
-            <a:r>
-              <a:rPr lang="en-US" sz="1350" dirty="0">
+              <a:lnSpc>
+                <a:spcPct val="106000"/>
+              </a:lnSpc>
+              <a:buNone/>
+            </a:pPr>
+            <a:r>
+              <a:rPr lang="en-US" sz="1250" dirty="0">
                 <a:solidFill>
                   <a:srgbClr val="6A5F78"/>
                 </a:solidFill>
@@ -2937,20 +2997,47 @@
               </a:rPr>
               <a:t>Shelf stock has a depletion floor while queue and footfall have ceilings — each raises the moment its window crosses in the right direction.</a:t>
             </a:r>
-            <a:endParaRPr lang="en-US" sz="1350" dirty="0"/>
-          </a:p>
-        </p:txBody>
-      </p:sp>
-      <p:sp>
-        <p:nvSpPr>
-          <p:cNvPr id="12" name="Shape 10"/>
-          <p:cNvSpPr/>
-          <p:nvPr/>
-        </p:nvSpPr>
-        <p:spPr>
-          <a:xfrm>
-            <a:off x="731520" y="4800600"/>
-            <a:ext cx="685800" cy="685800"/>
+            <a:endParaRPr lang="en-US" sz="1250" dirty="0"/>
+          </a:p>
+        </p:txBody>
+      </p:sp>
+      <p:sp>
+        <p:nvSpPr>
+          <p:cNvPr id="14" name="Shape 12"/>
+          <p:cNvSpPr/>
+          <p:nvPr/>
+        </p:nvSpPr>
+        <p:spPr>
+          <a:xfrm>
+            <a:off x="8193024" y="1874520"/>
+            <a:ext cx="3502152" cy="3977640"/>
+          </a:xfrm>
+          <a:prstGeom prst="roundRect">
+            <a:avLst>
+              <a:gd name="adj" fmla="val 2611"/>
+            </a:avLst>
+          </a:prstGeom>
+          <a:solidFill>
+            <a:srgbClr val="F2EEF8"/>
+          </a:solidFill>
+          <a:ln w="15240">
+            <a:solidFill>
+              <a:srgbClr val="7A52A8"/>
+            </a:solidFill>
+            <a:prstDash val="solid"/>
+          </a:ln>
+        </p:spPr>
+      </p:sp>
+      <p:sp>
+        <p:nvSpPr>
+          <p:cNvPr id="15" name="Shape 13"/>
+          <p:cNvSpPr/>
+          <p:nvPr/>
+        </p:nvSpPr>
+        <p:spPr>
+          <a:xfrm>
+            <a:off x="8467344" y="2148840"/>
+            <a:ext cx="603504" cy="603504"/>
           </a:xfrm>
           <a:prstGeom prst="ellipse">
             <a:avLst/>
@@ -2963,14 +3050,14 @@
       </p:sp>
       <p:sp>
         <p:nvSpPr>
-          <p:cNvPr id="13" name="Text 11"/>
-          <p:cNvSpPr/>
-          <p:nvPr/>
-        </p:nvSpPr>
-        <p:spPr>
-          <a:xfrm>
-            <a:off x="731520" y="4800600"/>
-            <a:ext cx="685800" cy="685800"/>
+          <p:cNvPr id="16" name="Text 14"/>
+          <p:cNvSpPr/>
+          <p:nvPr/>
+        </p:nvSpPr>
+        <p:spPr>
+          <a:xfrm>
+            <a:off x="8467344" y="2148840"/>
+            <a:ext cx="603504" cy="603504"/>
           </a:xfrm>
           <a:prstGeom prst="rect">
             <a:avLst/>
@@ -2986,7 +3073,7 @@
               <a:buNone/>
             </a:pPr>
             <a:r>
-              <a:rPr lang="en-US" sz="2600" b="1" dirty="0">
+              <a:rPr lang="en-US" sz="2200" b="1" dirty="0">
                 <a:solidFill>
                   <a:srgbClr val="FFFFFF"/>
                 </a:solidFill>
@@ -2996,20 +3083,20 @@
               </a:rPr>
               <a:t>3</a:t>
             </a:r>
-            <a:endParaRPr lang="en-US" sz="2600" dirty="0"/>
-          </a:p>
-        </p:txBody>
-      </p:sp>
-      <p:sp>
-        <p:nvSpPr>
-          <p:cNvPr id="14" name="Text 12"/>
-          <p:cNvSpPr/>
-          <p:nvPr/>
-        </p:nvSpPr>
-        <p:spPr>
-          <a:xfrm>
-            <a:off x="1691640" y="4754880"/>
-            <a:ext cx="9875520" cy="411480"/>
+            <a:endParaRPr lang="en-US" sz="2200" dirty="0"/>
+          </a:p>
+        </p:txBody>
+      </p:sp>
+      <p:sp>
+        <p:nvSpPr>
+          <p:cNvPr id="17" name="Text 15"/>
+          <p:cNvSpPr/>
+          <p:nvPr/>
+        </p:nvSpPr>
+        <p:spPr>
+          <a:xfrm>
+            <a:off x="8467344" y="2898648"/>
+            <a:ext cx="2953512" cy="777240"/>
           </a:xfrm>
           <a:prstGeom prst="rect">
             <a:avLst/>
@@ -3025,7 +3112,7 @@
               <a:buNone/>
             </a:pPr>
             <a:r>
-              <a:rPr lang="en-US" sz="1800" b="1" dirty="0">
+              <a:rPr lang="en-US" sz="1600" b="1" dirty="0">
                 <a:solidFill>
                   <a:srgbClr val="221A2E"/>
                 </a:solidFill>
@@ -3035,20 +3122,20 @@
               </a:rPr>
               <a:t>A refrigeration warning on real data</a:t>
             </a:r>
-            <a:endParaRPr lang="en-US" sz="1800" dirty="0"/>
-          </a:p>
-        </p:txBody>
-      </p:sp>
-      <p:sp>
-        <p:nvSpPr>
-          <p:cNvPr id="15" name="Text 13"/>
-          <p:cNvSpPr/>
-          <p:nvPr/>
-        </p:nvSpPr>
-        <p:spPr>
-          <a:xfrm>
-            <a:off x="1691640" y="5175504"/>
-            <a:ext cx="9875520" cy="640080"/>
+            <a:endParaRPr lang="en-US" sz="1600" dirty="0"/>
+          </a:p>
+        </p:txBody>
+      </p:sp>
+      <p:sp>
+        <p:nvSpPr>
+          <p:cNvPr id="18" name="Text 16"/>
+          <p:cNvSpPr/>
+          <p:nvPr/>
+        </p:nvSpPr>
+        <p:spPr>
+          <a:xfrm>
+            <a:off x="8467344" y="3657600"/>
+            <a:ext cx="2953512" cy="2011680"/>
           </a:xfrm>
           <a:prstGeom prst="rect">
             <a:avLst/>
@@ -3061,10 +3148,13 @@
           <a:lstStyle/>
           <a:p>
             <a:pPr indent="0" marL="0">
-              <a:buNone/>
-            </a:pPr>
-            <a:r>
-              <a:rPr lang="en-US" sz="1350" dirty="0">
+              <a:lnSpc>
+                <a:spcPct val="106000"/>
+              </a:lnSpc>
+              <a:buNone/>
+            </a:pPr>
+            <a:r>
+              <a:rPr lang="en-US" sz="1250" dirty="0">
                 <a:solidFill>
                   <a:srgbClr val="6A5F78"/>
                 </a:solidFill>
@@ -3074,46 +3164,7 @@
               </a:rPr>
               <a:t>A fridge drifting warm in one store raises the refrigeration warning on its card while the rest stay nominal.</a:t>
             </a:r>
-            <a:endParaRPr lang="en-US" sz="1350" dirty="0"/>
-          </a:p>
-        </p:txBody>
-      </p:sp>
-      <p:sp>
-        <p:nvSpPr>
-          <p:cNvPr id="16" name="Text 14"/>
-          <p:cNvSpPr/>
-          <p:nvPr/>
-        </p:nvSpPr>
-        <p:spPr>
-          <a:xfrm>
-            <a:off x="640080" y="6263640"/>
-            <a:ext cx="10972800" cy="365760"/>
-          </a:xfrm>
-          <a:prstGeom prst="rect">
-            <a:avLst/>
-          </a:prstGeom>
-          <a:noFill/>
-          <a:ln/>
-        </p:spPr>
-        <p:txBody>
-          <a:bodyPr wrap="square" rtlCol="0" anchor="ctr"/>
-          <a:lstStyle/>
-          <a:p>
-            <a:pPr indent="0" marL="0">
-              <a:buNone/>
-            </a:pPr>
-            <a:r>
-              <a:rPr lang="en-US" sz="1300" i="1" dirty="0">
-                <a:solidFill>
-                  <a:srgbClr val="9D7BC0"/>
-                </a:solidFill>
-                <a:latin typeface="Calibri" pitchFamily="34" charset="0"/>
-                <a:ea typeface="Calibri" pitchFamily="34" charset="-122"/>
-                <a:cs typeface="Calibri" pitchFamily="34" charset="-120"/>
-              </a:rPr>
-              <a:t>Switch to the live dashboard here — backup video ready.</a:t>
-            </a:r>
-            <a:endParaRPr lang="en-US" sz="1300" dirty="0"/>
+            <a:endParaRPr lang="en-US" sz="1250" dirty="0"/>
           </a:p>
         </p:txBody>
       </p:sp>

--- a/ppt/AdithyaReddyMadireddy_X25120280_retail-footfall-inventory.pptx
+++ b/ppt/AdithyaReddyMadireddy_X25120280_retail-footfall-inventory.pptx
@@ -1484,17 +1484,6 @@
             <a:pPr indent="0" marL="0">
               <a:buNone/>
             </a:pPr>
-            <a:r>
-              <a:rPr lang="en-US" sz="1300" dirty="0">
-                <a:solidFill>
-                  <a:srgbClr val="6A5F78"/>
-                </a:solidFill>
-                <a:latin typeface="Calibri" pitchFamily="34" charset="0"/>
-                <a:ea typeface="Calibri" pitchFamily="34" charset="-122"/>
-                <a:cs typeface="Calibri" pitchFamily="34" charset="-120"/>
-              </a:rPr>
-              <a:t>Fog &amp; Edge Computing (H9FECC)   ·   deployed live on AWS</a:t>
-            </a:r>
             <a:endParaRPr lang="en-US" sz="1300" dirty="0"/>
           </a:p>
         </p:txBody>
